--- a/13_Lab_QoS.pptx
+++ b/13_Lab_QoS.pptx
@@ -220,7 +220,7 @@
           <a:p>
             <a:fld id="{A5AA3E45-57A9-44A4-8D02-ECC452318D6C}" type="datetimeFigureOut">
               <a:rPr lang="en-US" smtClean="0"/>
-              <a:t>3/20/2025</a:t>
+              <a:t>10/21/2025</a:t>
             </a:fld>
             <a:endParaRPr lang="en-US"/>
           </a:p>
@@ -712,6 +712,12 @@
               <a:rPr lang="en-US" dirty="0" smtClean="0"/>
               <a:t>https://networklessons.com/quality-of-service/introduction-qos-quality-service</a:t>
             </a:r>
+          </a:p>
+          <a:p>
+            <a:r>
+              <a:rPr lang="en-US" dirty="0" smtClean="0"/>
+              <a:t>https://polar91.wordpress.com/2017/09/27/configure-multilayer-switch-on-packet-tracer/</a:t>
+            </a:r>
             <a:endParaRPr lang="en-US" dirty="0"/>
           </a:p>
         </p:txBody>
@@ -883,7 +889,7 @@
           <a:p>
             <a:fld id="{6F28CD25-4015-481E-94C9-A931395C8E35}" type="datetimeFigureOut">
               <a:rPr lang="en-US" smtClean="0"/>
-              <a:t>3/20/2025</a:t>
+              <a:t>10/21/2025</a:t>
             </a:fld>
             <a:endParaRPr lang="en-US"/>
           </a:p>
@@ -1053,7 +1059,7 @@
           <a:p>
             <a:fld id="{6F28CD25-4015-481E-94C9-A931395C8E35}" type="datetimeFigureOut">
               <a:rPr lang="en-US" smtClean="0"/>
-              <a:t>3/20/2025</a:t>
+              <a:t>10/21/2025</a:t>
             </a:fld>
             <a:endParaRPr lang="en-US"/>
           </a:p>
@@ -1233,7 +1239,7 @@
           <a:p>
             <a:fld id="{6F28CD25-4015-481E-94C9-A931395C8E35}" type="datetimeFigureOut">
               <a:rPr lang="en-US" smtClean="0"/>
-              <a:t>3/20/2025</a:t>
+              <a:t>10/21/2025</a:t>
             </a:fld>
             <a:endParaRPr lang="en-US"/>
           </a:p>
@@ -1403,7 +1409,7 @@
           <a:p>
             <a:fld id="{6F28CD25-4015-481E-94C9-A931395C8E35}" type="datetimeFigureOut">
               <a:rPr lang="en-US" smtClean="0"/>
-              <a:t>3/20/2025</a:t>
+              <a:t>10/21/2025</a:t>
             </a:fld>
             <a:endParaRPr lang="en-US"/>
           </a:p>
@@ -1649,7 +1655,7 @@
           <a:p>
             <a:fld id="{6F28CD25-4015-481E-94C9-A931395C8E35}" type="datetimeFigureOut">
               <a:rPr lang="en-US" smtClean="0"/>
-              <a:t>3/20/2025</a:t>
+              <a:t>10/21/2025</a:t>
             </a:fld>
             <a:endParaRPr lang="en-US"/>
           </a:p>
@@ -1881,7 +1887,7 @@
           <a:p>
             <a:fld id="{6F28CD25-4015-481E-94C9-A931395C8E35}" type="datetimeFigureOut">
               <a:rPr lang="en-US" smtClean="0"/>
-              <a:t>3/20/2025</a:t>
+              <a:t>10/21/2025</a:t>
             </a:fld>
             <a:endParaRPr lang="en-US"/>
           </a:p>
@@ -2248,7 +2254,7 @@
           <a:p>
             <a:fld id="{6F28CD25-4015-481E-94C9-A931395C8E35}" type="datetimeFigureOut">
               <a:rPr lang="en-US" smtClean="0"/>
-              <a:t>3/20/2025</a:t>
+              <a:t>10/21/2025</a:t>
             </a:fld>
             <a:endParaRPr lang="en-US"/>
           </a:p>
@@ -2366,7 +2372,7 @@
           <a:p>
             <a:fld id="{6F28CD25-4015-481E-94C9-A931395C8E35}" type="datetimeFigureOut">
               <a:rPr lang="en-US" smtClean="0"/>
-              <a:t>3/20/2025</a:t>
+              <a:t>10/21/2025</a:t>
             </a:fld>
             <a:endParaRPr lang="en-US"/>
           </a:p>
@@ -2461,7 +2467,7 @@
           <a:p>
             <a:fld id="{6F28CD25-4015-481E-94C9-A931395C8E35}" type="datetimeFigureOut">
               <a:rPr lang="en-US" smtClean="0"/>
-              <a:t>3/20/2025</a:t>
+              <a:t>10/21/2025</a:t>
             </a:fld>
             <a:endParaRPr lang="en-US"/>
           </a:p>
@@ -2738,7 +2744,7 @@
           <a:p>
             <a:fld id="{6F28CD25-4015-481E-94C9-A931395C8E35}" type="datetimeFigureOut">
               <a:rPr lang="en-US" smtClean="0"/>
-              <a:t>3/20/2025</a:t>
+              <a:t>10/21/2025</a:t>
             </a:fld>
             <a:endParaRPr lang="en-US"/>
           </a:p>
@@ -2995,7 +3001,7 @@
           <a:p>
             <a:fld id="{6F28CD25-4015-481E-94C9-A931395C8E35}" type="datetimeFigureOut">
               <a:rPr lang="en-US" smtClean="0"/>
-              <a:t>3/20/2025</a:t>
+              <a:t>10/21/2025</a:t>
             </a:fld>
             <a:endParaRPr lang="en-US"/>
           </a:p>
@@ -3208,7 +3214,7 @@
           <a:p>
             <a:fld id="{6F28CD25-4015-481E-94C9-A931395C8E35}" type="datetimeFigureOut">
               <a:rPr lang="en-US" smtClean="0"/>
-              <a:t>3/20/2025</a:t>
+              <a:t>10/21/2025</a:t>
             </a:fld>
             <a:endParaRPr lang="en-US"/>
           </a:p>
@@ -3639,90 +3645,6 @@
           </a:prstGeom>
         </p:spPr>
       </p:pic>
-      <p:sp>
-        <p:nvSpPr>
-          <p:cNvPr id="15" name="Rectangle 14"/>
-          <p:cNvSpPr/>
-          <p:nvPr/>
-        </p:nvSpPr>
-        <p:spPr>
-          <a:xfrm>
-            <a:off x="9202455" y="6066229"/>
-            <a:ext cx="2811352" cy="420756"/>
-          </a:xfrm>
-          <a:prstGeom prst="rect">
-            <a:avLst/>
-          </a:prstGeom>
-        </p:spPr>
-        <p:txBody>
-          <a:bodyPr wrap="square">
-            <a:spAutoFit/>
-          </a:bodyPr>
-          <a:lstStyle/>
-          <a:p>
-            <a:r>
-              <a:rPr lang="en-US" sz="1067" dirty="0"/>
-              <a:t>https://www.youtube.com/@AmelOline/videos</a:t>
-            </a:r>
-          </a:p>
-        </p:txBody>
-      </p:sp>
-      <p:sp>
-        <p:nvSpPr>
-          <p:cNvPr id="16" name="Rectangle 15"/>
-          <p:cNvSpPr/>
-          <p:nvPr/>
-        </p:nvSpPr>
-        <p:spPr>
-          <a:xfrm>
-            <a:off x="10158153" y="5809684"/>
-            <a:ext cx="1782399" cy="256545"/>
-          </a:xfrm>
-          <a:prstGeom prst="rect">
-            <a:avLst/>
-          </a:prstGeom>
-        </p:spPr>
-        <p:txBody>
-          <a:bodyPr wrap="square">
-            <a:spAutoFit/>
-          </a:bodyPr>
-          <a:lstStyle/>
-          <a:p>
-            <a:r>
-              <a:rPr lang="en-US" sz="1067" dirty="0"/>
-              <a:t>https://github.com/siagianp</a:t>
-            </a:r>
-          </a:p>
-        </p:txBody>
-      </p:sp>
-      <p:sp>
-        <p:nvSpPr>
-          <p:cNvPr id="17" name="Rectangle 16"/>
-          <p:cNvSpPr/>
-          <p:nvPr/>
-        </p:nvSpPr>
-        <p:spPr>
-          <a:xfrm>
-            <a:off x="8085399" y="6276607"/>
-            <a:ext cx="4023019" cy="256545"/>
-          </a:xfrm>
-          <a:prstGeom prst="rect">
-            <a:avLst/>
-          </a:prstGeom>
-        </p:spPr>
-        <p:txBody>
-          <a:bodyPr wrap="square">
-            <a:spAutoFit/>
-          </a:bodyPr>
-          <a:lstStyle/>
-          <a:p>
-            <a:r>
-              <a:rPr lang="en-US" sz="1067" dirty="0"/>
-              <a:t>https://github.com/amelcharolinesgn2/IoT_simulator-mqtt-NodeRed</a:t>
-            </a:r>
-          </a:p>
-        </p:txBody>
-      </p:sp>
       <p:pic>
         <p:nvPicPr>
           <p:cNvPr id="30" name="Picture 29"/>
@@ -5258,34 +5180,6 @@
       </p:sp>
       <p:sp>
         <p:nvSpPr>
-          <p:cNvPr id="22" name="Rectangle 21"/>
-          <p:cNvSpPr/>
-          <p:nvPr/>
-        </p:nvSpPr>
-        <p:spPr>
-          <a:xfrm>
-            <a:off x="8085399" y="6425847"/>
-            <a:ext cx="3388876" cy="338554"/>
-          </a:xfrm>
-          <a:prstGeom prst="rect">
-            <a:avLst/>
-          </a:prstGeom>
-        </p:spPr>
-        <p:txBody>
-          <a:bodyPr wrap="none">
-            <a:spAutoFit/>
-          </a:bodyPr>
-          <a:lstStyle/>
-          <a:p>
-            <a:r>
-              <a:rPr lang="en-US" sz="1600" dirty="0"/>
-              <a:t>github.com/amelcharolinesgn2/ANJAR</a:t>
-            </a:r>
-          </a:p>
-        </p:txBody>
-      </p:sp>
-      <p:sp>
-        <p:nvSpPr>
           <p:cNvPr id="2" name="Rectangle 1"/>
           <p:cNvSpPr/>
           <p:nvPr/>
@@ -5362,7 +5256,7 @@
         <p:spPr>
           <a:xfrm>
             <a:off x="2947791" y="2889838"/>
-            <a:ext cx="3794437" cy="338554"/>
+            <a:ext cx="6514091" cy="584775"/>
           </a:xfrm>
           <a:prstGeom prst="rect">
             <a:avLst/>
@@ -5375,14 +5269,220 @@
           <a:lstStyle/>
           <a:p>
             <a:r>
-              <a:rPr lang="en-US" sz="1600" dirty="0" smtClean="0"/>
-              <a:t>github.com/amelcharolinesgn2/ANJAR/</a:t>
-            </a:r>
-            <a:r>
-              <a:rPr lang="en-US" sz="1600" dirty="0" err="1" smtClean="0"/>
-              <a:t>Qos</a:t>
-            </a:r>
-            <a:endParaRPr lang="en-US" sz="1600" dirty="0"/>
+              <a:rPr lang="en-US" sz="1600" dirty="0">
+                <a:hlinkClick r:id="rId9"/>
+              </a:rPr>
+              <a:t>https://</a:t>
+            </a:r>
+            <a:r>
+              <a:rPr lang="en-US" sz="1600" dirty="0" smtClean="0">
+                <a:hlinkClick r:id="rId9"/>
+              </a:rPr>
+              <a:t>github.com/amelcharolinesgn2/ANJAR/blob/main/Qos.mp4</a:t>
+            </a:r>
+            <a:endParaRPr lang="en-US" sz="1600" dirty="0" smtClean="0"/>
+          </a:p>
+          <a:p>
+            <a:r>
+              <a:rPr lang="en-US" sz="1600" dirty="0"/>
+              <a:t>https://github.com/amelcharolinesgn2/ANJAR/blob/main/13_Lab_QoS.pptx</a:t>
+            </a:r>
+          </a:p>
+        </p:txBody>
+      </p:sp>
+      <p:sp>
+        <p:nvSpPr>
+          <p:cNvPr id="5" name="Rectangle 4"/>
+          <p:cNvSpPr/>
+          <p:nvPr/>
+        </p:nvSpPr>
+        <p:spPr>
+          <a:xfrm>
+            <a:off x="2947791" y="3474613"/>
+            <a:ext cx="4860433" cy="369332"/>
+          </a:xfrm>
+          <a:prstGeom prst="rect">
+            <a:avLst/>
+          </a:prstGeom>
+        </p:spPr>
+        <p:txBody>
+          <a:bodyPr wrap="none">
+            <a:spAutoFit/>
+          </a:bodyPr>
+          <a:lstStyle/>
+          <a:p>
+            <a:r>
+              <a:rPr lang="en-US" dirty="0"/>
+              <a:t>https://www.youtube.com/watch?v=4v7vCZ1p6EI</a:t>
+            </a:r>
+          </a:p>
+        </p:txBody>
+      </p:sp>
+      <p:sp>
+        <p:nvSpPr>
+          <p:cNvPr id="25" name="Rectangle 24"/>
+          <p:cNvSpPr/>
+          <p:nvPr/>
+        </p:nvSpPr>
+        <p:spPr>
+          <a:xfrm>
+            <a:off x="9627130" y="5958533"/>
+            <a:ext cx="2487830" cy="215444"/>
+          </a:xfrm>
+          <a:prstGeom prst="rect">
+            <a:avLst/>
+          </a:prstGeom>
+        </p:spPr>
+        <p:txBody>
+          <a:bodyPr wrap="square">
+            <a:spAutoFit/>
+          </a:bodyPr>
+          <a:lstStyle/>
+          <a:p>
+            <a:r>
+              <a:rPr lang="en-US" sz="800" dirty="0"/>
+              <a:t>https://www.youtube.com/@AmelOline/videos</a:t>
+            </a:r>
+          </a:p>
+        </p:txBody>
+      </p:sp>
+      <p:sp>
+        <p:nvSpPr>
+          <p:cNvPr id="26" name="Rectangle 25"/>
+          <p:cNvSpPr/>
+          <p:nvPr/>
+        </p:nvSpPr>
+        <p:spPr>
+          <a:xfrm>
+            <a:off x="10416325" y="5820034"/>
+            <a:ext cx="1545230" cy="215444"/>
+          </a:xfrm>
+          <a:prstGeom prst="rect">
+            <a:avLst/>
+          </a:prstGeom>
+        </p:spPr>
+        <p:txBody>
+          <a:bodyPr wrap="square">
+            <a:spAutoFit/>
+          </a:bodyPr>
+          <a:lstStyle/>
+          <a:p>
+            <a:r>
+              <a:rPr lang="en-US" sz="800" dirty="0"/>
+              <a:t>https://github.com/siagianp</a:t>
+            </a:r>
+          </a:p>
+        </p:txBody>
+      </p:sp>
+      <p:sp>
+        <p:nvSpPr>
+          <p:cNvPr id="27" name="Rectangle 26"/>
+          <p:cNvSpPr/>
+          <p:nvPr/>
+        </p:nvSpPr>
+        <p:spPr>
+          <a:xfrm>
+            <a:off x="8701490" y="6097033"/>
+            <a:ext cx="3490509" cy="215444"/>
+          </a:xfrm>
+          <a:prstGeom prst="rect">
+            <a:avLst/>
+          </a:prstGeom>
+        </p:spPr>
+        <p:txBody>
+          <a:bodyPr wrap="square">
+            <a:spAutoFit/>
+          </a:bodyPr>
+          <a:lstStyle/>
+          <a:p>
+            <a:r>
+              <a:rPr lang="en-US" sz="800" dirty="0"/>
+              <a:t>https://github.com/amelcharolinesgn2/IoT_simulator-mqtt-NodeRed</a:t>
+            </a:r>
+          </a:p>
+        </p:txBody>
+      </p:sp>
+      <p:sp>
+        <p:nvSpPr>
+          <p:cNvPr id="29" name="Rectangle 28"/>
+          <p:cNvSpPr/>
+          <p:nvPr/>
+        </p:nvSpPr>
+        <p:spPr>
+          <a:xfrm>
+            <a:off x="9109530" y="6235532"/>
+            <a:ext cx="2746692" cy="338554"/>
+          </a:xfrm>
+          <a:prstGeom prst="rect">
+            <a:avLst/>
+          </a:prstGeom>
+        </p:spPr>
+        <p:txBody>
+          <a:bodyPr wrap="square">
+            <a:spAutoFit/>
+          </a:bodyPr>
+          <a:lstStyle/>
+          <a:p>
+            <a:r>
+              <a:rPr lang="en-US" sz="800" dirty="0"/>
+              <a:t>https://github.com/amelcharolinesgn2/Cloud-Infrastructures</a:t>
+            </a:r>
+          </a:p>
+        </p:txBody>
+      </p:sp>
+      <p:sp>
+        <p:nvSpPr>
+          <p:cNvPr id="32" name="Rectangle 31"/>
+          <p:cNvSpPr/>
+          <p:nvPr/>
+        </p:nvSpPr>
+        <p:spPr>
+          <a:xfrm>
+            <a:off x="8605022" y="6350948"/>
+            <a:ext cx="3286814" cy="338554"/>
+          </a:xfrm>
+          <a:prstGeom prst="rect">
+            <a:avLst/>
+          </a:prstGeom>
+        </p:spPr>
+        <p:txBody>
+          <a:bodyPr wrap="square">
+            <a:spAutoFit/>
+          </a:bodyPr>
+          <a:lstStyle/>
+          <a:p>
+            <a:r>
+              <a:rPr lang="en-US" sz="800" dirty="0"/>
+              <a:t>https://github.com/amelcharolinesgn2/ClouD-Infrastructure-SISKA-2025</a:t>
+            </a:r>
+          </a:p>
+        </p:txBody>
+      </p:sp>
+      <p:sp>
+        <p:nvSpPr>
+          <p:cNvPr id="33" name="Rectangle 32"/>
+          <p:cNvSpPr/>
+          <p:nvPr/>
+        </p:nvSpPr>
+        <p:spPr>
+          <a:xfrm>
+            <a:off x="8416690" y="6481799"/>
+            <a:ext cx="3775310" cy="215444"/>
+          </a:xfrm>
+          <a:prstGeom prst="rect">
+            <a:avLst/>
+          </a:prstGeom>
+        </p:spPr>
+        <p:txBody>
+          <a:bodyPr wrap="square">
+            <a:spAutoFit/>
+          </a:bodyPr>
+          <a:lstStyle/>
+          <a:p>
+            <a:r>
+              <a:rPr lang="en-US" sz="800" dirty="0"/>
+              <a:t>https://github.com/amelcharolinesgn2/Gyroscope-Sensor-Data-Accelerometer</a:t>
+            </a:r>
           </a:p>
         </p:txBody>
       </p:sp>
@@ -5457,7 +5557,6 @@
               <a:rPr lang="en-US" sz="2000" dirty="0"/>
               <a:t>to help you visualize classification and marking</a:t>
             </a:r>
-            <a:endParaRPr lang="en-US" sz="2000" dirty="0"/>
           </a:p>
         </p:txBody>
       </p:sp>
@@ -5965,7 +6064,12 @@
             <p:ph type="title"/>
           </p:nvPr>
         </p:nvSpPr>
-        <p:spPr/>
+        <p:spPr>
+          <a:xfrm>
+            <a:off x="555396" y="214296"/>
+            <a:ext cx="10515600" cy="1325563"/>
+          </a:xfrm>
+        </p:spPr>
         <p:txBody>
           <a:bodyPr/>
           <a:lstStyle/>
@@ -7382,6 +7486,174 @@
           </a:prstGeom>
         </p:spPr>
       </p:pic>
+      <p:sp>
+        <p:nvSpPr>
+          <p:cNvPr id="7" name="Rectangle 6"/>
+          <p:cNvSpPr/>
+          <p:nvPr/>
+        </p:nvSpPr>
+        <p:spPr>
+          <a:xfrm>
+            <a:off x="9554322" y="5728243"/>
+            <a:ext cx="2487830" cy="215444"/>
+          </a:xfrm>
+          <a:prstGeom prst="rect">
+            <a:avLst/>
+          </a:prstGeom>
+        </p:spPr>
+        <p:txBody>
+          <a:bodyPr wrap="square">
+            <a:spAutoFit/>
+          </a:bodyPr>
+          <a:lstStyle/>
+          <a:p>
+            <a:r>
+              <a:rPr lang="en-US" sz="800" dirty="0"/>
+              <a:t>https://www.youtube.com/@AmelOline/videos</a:t>
+            </a:r>
+          </a:p>
+        </p:txBody>
+      </p:sp>
+      <p:sp>
+        <p:nvSpPr>
+          <p:cNvPr id="8" name="Rectangle 7"/>
+          <p:cNvSpPr/>
+          <p:nvPr/>
+        </p:nvSpPr>
+        <p:spPr>
+          <a:xfrm>
+            <a:off x="10343517" y="5589744"/>
+            <a:ext cx="1545230" cy="215444"/>
+          </a:xfrm>
+          <a:prstGeom prst="rect">
+            <a:avLst/>
+          </a:prstGeom>
+        </p:spPr>
+        <p:txBody>
+          <a:bodyPr wrap="square">
+            <a:spAutoFit/>
+          </a:bodyPr>
+          <a:lstStyle/>
+          <a:p>
+            <a:r>
+              <a:rPr lang="en-US" sz="800" dirty="0"/>
+              <a:t>https://github.com/siagianp</a:t>
+            </a:r>
+          </a:p>
+        </p:txBody>
+      </p:sp>
+      <p:sp>
+        <p:nvSpPr>
+          <p:cNvPr id="9" name="Rectangle 8"/>
+          <p:cNvSpPr/>
+          <p:nvPr/>
+        </p:nvSpPr>
+        <p:spPr>
+          <a:xfrm>
+            <a:off x="8628682" y="5866743"/>
+            <a:ext cx="3490509" cy="215444"/>
+          </a:xfrm>
+          <a:prstGeom prst="rect">
+            <a:avLst/>
+          </a:prstGeom>
+        </p:spPr>
+        <p:txBody>
+          <a:bodyPr wrap="square">
+            <a:spAutoFit/>
+          </a:bodyPr>
+          <a:lstStyle/>
+          <a:p>
+            <a:r>
+              <a:rPr lang="en-US" sz="800" dirty="0"/>
+              <a:t>https://github.com/amelcharolinesgn2/IoT_simulator-mqtt-NodeRed</a:t>
+            </a:r>
+          </a:p>
+        </p:txBody>
+      </p:sp>
+      <p:sp>
+        <p:nvSpPr>
+          <p:cNvPr id="10" name="Rectangle 9"/>
+          <p:cNvSpPr/>
+          <p:nvPr/>
+        </p:nvSpPr>
+        <p:spPr>
+          <a:xfrm>
+            <a:off x="9036722" y="6005242"/>
+            <a:ext cx="2746692" cy="338554"/>
+          </a:xfrm>
+          <a:prstGeom prst="rect">
+            <a:avLst/>
+          </a:prstGeom>
+        </p:spPr>
+        <p:txBody>
+          <a:bodyPr wrap="square">
+            <a:spAutoFit/>
+          </a:bodyPr>
+          <a:lstStyle/>
+          <a:p>
+            <a:r>
+              <a:rPr lang="en-US" sz="800" dirty="0"/>
+              <a:t>https://github.com/amelcharolinesgn2/Cloud-Infrastructures</a:t>
+            </a:r>
+          </a:p>
+        </p:txBody>
+      </p:sp>
+      <p:sp>
+        <p:nvSpPr>
+          <p:cNvPr id="11" name="Rectangle 10"/>
+          <p:cNvSpPr/>
+          <p:nvPr/>
+        </p:nvSpPr>
+        <p:spPr>
+          <a:xfrm>
+            <a:off x="8532214" y="6120658"/>
+            <a:ext cx="3286814" cy="338554"/>
+          </a:xfrm>
+          <a:prstGeom prst="rect">
+            <a:avLst/>
+          </a:prstGeom>
+        </p:spPr>
+        <p:txBody>
+          <a:bodyPr wrap="square">
+            <a:spAutoFit/>
+          </a:bodyPr>
+          <a:lstStyle/>
+          <a:p>
+            <a:r>
+              <a:rPr lang="en-US" sz="800" dirty="0"/>
+              <a:t>https://github.com/amelcharolinesgn2/ClouD-Infrastructure-SISKA-2025</a:t>
+            </a:r>
+          </a:p>
+        </p:txBody>
+      </p:sp>
+      <p:sp>
+        <p:nvSpPr>
+          <p:cNvPr id="12" name="Rectangle 11"/>
+          <p:cNvSpPr/>
+          <p:nvPr/>
+        </p:nvSpPr>
+        <p:spPr>
+          <a:xfrm>
+            <a:off x="8343882" y="6251509"/>
+            <a:ext cx="3775310" cy="215444"/>
+          </a:xfrm>
+          <a:prstGeom prst="rect">
+            <a:avLst/>
+          </a:prstGeom>
+        </p:spPr>
+        <p:txBody>
+          <a:bodyPr wrap="square">
+            <a:spAutoFit/>
+          </a:bodyPr>
+          <a:lstStyle/>
+          <a:p>
+            <a:r>
+              <a:rPr lang="en-US" sz="800" dirty="0"/>
+              <a:t>https://github.com/amelcharolinesgn2/Gyroscope-Sensor-Data-Accelerometer</a:t>
+            </a:r>
+          </a:p>
+        </p:txBody>
+      </p:sp>
     </p:spTree>
     <p:extLst>
       <p:ext uri="{BB962C8B-B14F-4D97-AF65-F5344CB8AC3E}">
@@ -9472,7 +9744,6 @@
               <a:rPr lang="en-US" sz="2000" dirty="0"/>
               <a:t>that matches on TCP destination port 80 is a quick way to classify all HTTP traffic.</a:t>
             </a:r>
-            <a:endParaRPr lang="en-US" sz="2000" dirty="0"/>
           </a:p>
         </p:txBody>
       </p:sp>
